--- a/FIGURES/FIGURES.pptx
+++ b/FIGURES/FIGURES.pptx
@@ -307,949 +307,6 @@
                 </a:solidFill>
                 <a:effectLst/>
               </a:rPr>
-              <a:t>(A) </a:t>
-            </a:r>
-            <a:r>
-              <a:rPr lang="es-ES" sz="1600" b="1" i="1" u="none" strike="noStrike" baseline="0">
-                <a:solidFill>
-                  <a:sysClr val="windowText" lastClr="000000"/>
-                </a:solidFill>
-                <a:effectLst/>
-              </a:rPr>
-              <a:t>Ruditapes philippinarum</a:t>
-            </a:r>
-            <a:endParaRPr lang="es-ES" sz="1600" b="1" i="1">
-              <a:solidFill>
-                <a:sysClr val="windowText" lastClr="000000"/>
-              </a:solidFill>
-            </a:endParaRPr>
-          </a:p>
-        </c:rich>
-      </c:tx>
-      <c:layout>
-        <c:manualLayout>
-          <c:xMode val="edge"/>
-          <c:yMode val="edge"/>
-          <c:x val="0.28171522309711289"/>
-          <c:y val="2.7777777777777776E-2"/>
-        </c:manualLayout>
-      </c:layout>
-      <c:overlay val="0"/>
-      <c:spPr>
-        <a:noFill/>
-        <a:ln>
-          <a:noFill/>
-        </a:ln>
-        <a:effectLst/>
-      </c:spPr>
-      <c:txPr>
-        <a:bodyPr rot="0" spcFirstLastPara="1" vertOverflow="ellipsis" vert="horz" wrap="square" anchor="ctr" anchorCtr="1"/>
-        <a:lstStyle/>
-        <a:p>
-          <a:pPr>
-            <a:defRPr sz="1600" b="1" i="1" u="none" strike="noStrike" kern="1200" spc="0" baseline="0">
-              <a:solidFill>
-                <a:sysClr val="windowText" lastClr="000000"/>
-              </a:solidFill>
-              <a:latin typeface="+mn-lt"/>
-              <a:ea typeface="+mn-ea"/>
-              <a:cs typeface="+mn-cs"/>
-            </a:defRPr>
-          </a:pPr>
-          <a:endParaRPr lang="es-ES"/>
-        </a:p>
-      </c:txPr>
-    </c:title>
-    <c:autoTitleDeleted val="0"/>
-    <c:plotArea>
-      <c:layout>
-        <c:manualLayout>
-          <c:layoutTarget val="inner"/>
-          <c:xMode val="edge"/>
-          <c:yMode val="edge"/>
-          <c:x val="0.21046762904636918"/>
-          <c:y val="0.1947914843977836"/>
-          <c:w val="0.67977537182852132"/>
-          <c:h val="0.52277048702245554"/>
-        </c:manualLayout>
-      </c:layout>
-      <c:scatterChart>
-        <c:scatterStyle val="lineMarker"/>
-        <c:varyColors val="0"/>
-        <c:ser>
-          <c:idx val="0"/>
-          <c:order val="0"/>
-          <c:spPr>
-            <a:ln w="25400" cap="rnd">
-              <a:noFill/>
-              <a:round/>
-            </a:ln>
-            <a:effectLst/>
-          </c:spPr>
-          <c:marker>
-            <c:symbol val="circle"/>
-            <c:size val="6"/>
-            <c:spPr>
-              <a:solidFill>
-                <a:srgbClr val="0070C0"/>
-              </a:solidFill>
-              <a:ln w="9525">
-                <a:solidFill>
-                  <a:srgbClr val="0070C0"/>
-                </a:solidFill>
-              </a:ln>
-              <a:effectLst/>
-            </c:spPr>
-          </c:marker>
-          <c:trendline>
-            <c:spPr>
-              <a:ln w="31750" cap="rnd">
-                <a:solidFill>
-                  <a:srgbClr val="FF0000"/>
-                </a:solidFill>
-                <a:prstDash val="solid"/>
-              </a:ln>
-              <a:effectLst/>
-            </c:spPr>
-            <c:trendlineType val="linear"/>
-            <c:dispRSqr val="0"/>
-            <c:dispEq val="0"/>
-          </c:trendline>
-          <c:xVal>
-            <c:numRef>
-              <c:f>'Inbreeding parents clams'!$M$2:$M$87</c:f>
-              <c:numCache>
-                <c:formatCode>General</c:formatCode>
-                <c:ptCount val="86"/>
-                <c:pt idx="0">
-                  <c:v>-3.506E-3</c:v>
-                </c:pt>
-                <c:pt idx="1">
-                  <c:v>7.3868000000000003E-2</c:v>
-                </c:pt>
-                <c:pt idx="2">
-                  <c:v>5.0209999999999998E-2</c:v>
-                </c:pt>
-                <c:pt idx="3">
-                  <c:v>4.8550000000000003E-2</c:v>
-                </c:pt>
-                <c:pt idx="4">
-                  <c:v>7.6110999999999998E-2</c:v>
-                </c:pt>
-                <c:pt idx="5">
-                  <c:v>-5.0615E-2</c:v>
-                </c:pt>
-                <c:pt idx="6">
-                  <c:v>2.5264999999999999E-2</c:v>
-                </c:pt>
-                <c:pt idx="7">
-                  <c:v>5.7069000000000002E-2</c:v>
-                </c:pt>
-                <c:pt idx="8">
-                  <c:v>7.5239E-2</c:v>
-                </c:pt>
-                <c:pt idx="9">
-                  <c:v>8.1988000000000005E-2</c:v>
-                </c:pt>
-                <c:pt idx="10">
-                  <c:v>3.6008999999999999E-2</c:v>
-                </c:pt>
-                <c:pt idx="11">
-                  <c:v>1.0361E-2</c:v>
-                </c:pt>
-                <c:pt idx="12">
-                  <c:v>3.3397999999999997E-2</c:v>
-                </c:pt>
-                <c:pt idx="13">
-                  <c:v>4.1079999999999997E-3</c:v>
-                </c:pt>
-                <c:pt idx="14">
-                  <c:v>-4.28E-3</c:v>
-                </c:pt>
-                <c:pt idx="15">
-                  <c:v>5.8209999999999998E-2</c:v>
-                </c:pt>
-                <c:pt idx="16">
-                  <c:v>5.9781000000000001E-2</c:v>
-                </c:pt>
-                <c:pt idx="17">
-                  <c:v>4.6309000000000003E-2</c:v>
-                </c:pt>
-                <c:pt idx="18">
-                  <c:v>4.0603E-2</c:v>
-                </c:pt>
-                <c:pt idx="19">
-                  <c:v>4.3715999999999998E-2</c:v>
-                </c:pt>
-                <c:pt idx="20">
-                  <c:v>2.2761E-2</c:v>
-                </c:pt>
-                <c:pt idx="21">
-                  <c:v>9.9270000000000001E-3</c:v>
-                </c:pt>
-                <c:pt idx="22">
-                  <c:v>3.4058999999999999E-2</c:v>
-                </c:pt>
-                <c:pt idx="23">
-                  <c:v>2.8809999999999999E-2</c:v>
-                </c:pt>
-                <c:pt idx="24">
-                  <c:v>4.5182E-2</c:v>
-                </c:pt>
-                <c:pt idx="25">
-                  <c:v>-2.405E-3</c:v>
-                </c:pt>
-                <c:pt idx="26">
-                  <c:v>3.8150999999999997E-2</c:v>
-                </c:pt>
-                <c:pt idx="27">
-                  <c:v>-8.5079999999999999E-3</c:v>
-                </c:pt>
-                <c:pt idx="28">
-                  <c:v>2.845E-2</c:v>
-                </c:pt>
-                <c:pt idx="29">
-                  <c:v>4.1787999999999999E-2</c:v>
-                </c:pt>
-                <c:pt idx="30">
-                  <c:v>-3.4924999999999998E-2</c:v>
-                </c:pt>
-                <c:pt idx="31">
-                  <c:v>6.4011999999999999E-2</c:v>
-                </c:pt>
-                <c:pt idx="32">
-                  <c:v>5.4703000000000002E-2</c:v>
-                </c:pt>
-                <c:pt idx="33">
-                  <c:v>2.5969999999999999E-3</c:v>
-                </c:pt>
-                <c:pt idx="34">
-                  <c:v>6.0472999999999999E-2</c:v>
-                </c:pt>
-                <c:pt idx="35">
-                  <c:v>4.3618999999999998E-2</c:v>
-                </c:pt>
-                <c:pt idx="36">
-                  <c:v>-1.231E-2</c:v>
-                </c:pt>
-                <c:pt idx="37">
-                  <c:v>-2.3195E-2</c:v>
-                </c:pt>
-                <c:pt idx="38">
-                  <c:v>2.2683999999999999E-2</c:v>
-                </c:pt>
-                <c:pt idx="39">
-                  <c:v>2.8518999999999999E-2</c:v>
-                </c:pt>
-                <c:pt idx="40">
-                  <c:v>5.4627000000000002E-2</c:v>
-                </c:pt>
-                <c:pt idx="41">
-                  <c:v>3.2807999999999997E-2</c:v>
-                </c:pt>
-                <c:pt idx="42">
-                  <c:v>4.6455999999999997E-2</c:v>
-                </c:pt>
-                <c:pt idx="43">
-                  <c:v>8.3929999999999994E-3</c:v>
-                </c:pt>
-                <c:pt idx="44">
-                  <c:v>-3.2795999999999999E-2</c:v>
-                </c:pt>
-                <c:pt idx="45">
-                  <c:v>6.5534999999999996E-2</c:v>
-                </c:pt>
-                <c:pt idx="46">
-                  <c:v>4.8725999999999998E-2</c:v>
-                </c:pt>
-                <c:pt idx="47">
-                  <c:v>2.9079000000000001E-2</c:v>
-                </c:pt>
-                <c:pt idx="48">
-                  <c:v>3.6470000000000002E-2</c:v>
-                </c:pt>
-                <c:pt idx="49">
-                  <c:v>-5.241E-3</c:v>
-                </c:pt>
-                <c:pt idx="50">
-                  <c:v>9.4783000000000006E-2</c:v>
-                </c:pt>
-                <c:pt idx="51">
-                  <c:v>4.1978000000000001E-2</c:v>
-                </c:pt>
-                <c:pt idx="52">
-                  <c:v>8.3700999999999998E-2</c:v>
-                </c:pt>
-                <c:pt idx="53">
-                  <c:v>3.9510000000000003E-2</c:v>
-                </c:pt>
-                <c:pt idx="54">
-                  <c:v>3.9649999999999998E-2</c:v>
-                </c:pt>
-                <c:pt idx="55">
-                  <c:v>6.9248000000000004E-2</c:v>
-                </c:pt>
-                <c:pt idx="56">
-                  <c:v>5.3572000000000002E-2</c:v>
-                </c:pt>
-                <c:pt idx="57">
-                  <c:v>3.6739000000000001E-2</c:v>
-                </c:pt>
-                <c:pt idx="58">
-                  <c:v>5.4754999999999998E-2</c:v>
-                </c:pt>
-                <c:pt idx="59">
-                  <c:v>6.7171999999999996E-2</c:v>
-                </c:pt>
-                <c:pt idx="60">
-                  <c:v>1.6004999999999998E-2</c:v>
-                </c:pt>
-                <c:pt idx="61">
-                  <c:v>5.5389000000000001E-2</c:v>
-                </c:pt>
-                <c:pt idx="62">
-                  <c:v>3.2661000000000003E-2</c:v>
-                </c:pt>
-                <c:pt idx="63">
-                  <c:v>5.6009000000000003E-2</c:v>
-                </c:pt>
-                <c:pt idx="64">
-                  <c:v>3.0640000000000001E-2</c:v>
-                </c:pt>
-                <c:pt idx="65">
-                  <c:v>4.4865000000000002E-2</c:v>
-                </c:pt>
-                <c:pt idx="66">
-                  <c:v>4.8495999999999997E-2</c:v>
-                </c:pt>
-                <c:pt idx="67">
-                  <c:v>2.4251000000000002E-2</c:v>
-                </c:pt>
-                <c:pt idx="68">
-                  <c:v>4.2154999999999998E-2</c:v>
-                </c:pt>
-                <c:pt idx="69">
-                  <c:v>6.3949000000000006E-2</c:v>
-                </c:pt>
-                <c:pt idx="70">
-                  <c:v>1.5030999999999999E-2</c:v>
-                </c:pt>
-                <c:pt idx="71">
-                  <c:v>1.8870999999999999E-2</c:v>
-                </c:pt>
-                <c:pt idx="72">
-                  <c:v>1.9241999999999999E-2</c:v>
-                </c:pt>
-                <c:pt idx="73">
-                  <c:v>2.2589999999999999E-2</c:v>
-                </c:pt>
-                <c:pt idx="74">
-                  <c:v>3.1130999999999999E-2</c:v>
-                </c:pt>
-                <c:pt idx="75">
-                  <c:v>3.8386000000000003E-2</c:v>
-                </c:pt>
-                <c:pt idx="76">
-                  <c:v>3.2615999999999999E-2</c:v>
-                </c:pt>
-                <c:pt idx="77">
-                  <c:v>1.0436000000000001E-2</c:v>
-                </c:pt>
-                <c:pt idx="78">
-                  <c:v>4.0391999999999997E-2</c:v>
-                </c:pt>
-                <c:pt idx="79">
-                  <c:v>2.2093000000000002E-2</c:v>
-                </c:pt>
-                <c:pt idx="80">
-                  <c:v>3.1461999999999997E-2</c:v>
-                </c:pt>
-                <c:pt idx="81">
-                  <c:v>3.0511E-2</c:v>
-                </c:pt>
-                <c:pt idx="82">
-                  <c:v>2.6616000000000001E-2</c:v>
-                </c:pt>
-                <c:pt idx="83">
-                  <c:v>6.4321000000000003E-2</c:v>
-                </c:pt>
-                <c:pt idx="84">
-                  <c:v>7.8711000000000003E-2</c:v>
-                </c:pt>
-                <c:pt idx="85">
-                  <c:v>7.0677000000000004E-2</c:v>
-                </c:pt>
-              </c:numCache>
-            </c:numRef>
-          </c:xVal>
-          <c:yVal>
-            <c:numRef>
-              <c:f>'Inbreeding parents clams'!$E$2:$E$87</c:f>
-              <c:numCache>
-                <c:formatCode>General</c:formatCode>
-                <c:ptCount val="86"/>
-                <c:pt idx="0">
-                  <c:v>39.049999999999997</c:v>
-                </c:pt>
-                <c:pt idx="1">
-                  <c:v>35.32</c:v>
-                </c:pt>
-                <c:pt idx="2">
-                  <c:v>40.1</c:v>
-                </c:pt>
-                <c:pt idx="3">
-                  <c:v>35.94</c:v>
-                </c:pt>
-                <c:pt idx="4">
-                  <c:v>39.08</c:v>
-                </c:pt>
-                <c:pt idx="5">
-                  <c:v>38.520000000000003</c:v>
-                </c:pt>
-                <c:pt idx="6">
-                  <c:v>40.39</c:v>
-                </c:pt>
-                <c:pt idx="7">
-                  <c:v>36.85</c:v>
-                </c:pt>
-                <c:pt idx="8">
-                  <c:v>38.74</c:v>
-                </c:pt>
-                <c:pt idx="9">
-                  <c:v>37.28</c:v>
-                </c:pt>
-                <c:pt idx="10">
-                  <c:v>40.06</c:v>
-                </c:pt>
-                <c:pt idx="11">
-                  <c:v>38.64</c:v>
-                </c:pt>
-                <c:pt idx="12">
-                  <c:v>36.56</c:v>
-                </c:pt>
-                <c:pt idx="13">
-                  <c:v>37.659999999999997</c:v>
-                </c:pt>
-                <c:pt idx="14">
-                  <c:v>39.69</c:v>
-                </c:pt>
-                <c:pt idx="15">
-                  <c:v>39.130000000000003</c:v>
-                </c:pt>
-                <c:pt idx="16">
-                  <c:v>39.33</c:v>
-                </c:pt>
-                <c:pt idx="17">
-                  <c:v>36.25</c:v>
-                </c:pt>
-                <c:pt idx="18">
-                  <c:v>37.94</c:v>
-                </c:pt>
-                <c:pt idx="19">
-                  <c:v>37.47</c:v>
-                </c:pt>
-                <c:pt idx="20">
-                  <c:v>35.979999999999997</c:v>
-                </c:pt>
-                <c:pt idx="21">
-                  <c:v>37.75</c:v>
-                </c:pt>
-                <c:pt idx="22">
-                  <c:v>34.35</c:v>
-                </c:pt>
-                <c:pt idx="23">
-                  <c:v>39.549999999999997</c:v>
-                </c:pt>
-                <c:pt idx="24">
-                  <c:v>40.17</c:v>
-                </c:pt>
-                <c:pt idx="25">
-                  <c:v>38.549999999999997</c:v>
-                </c:pt>
-                <c:pt idx="26">
-                  <c:v>40.6</c:v>
-                </c:pt>
-                <c:pt idx="27">
-                  <c:v>44.66</c:v>
-                </c:pt>
-                <c:pt idx="28">
-                  <c:v>39.61</c:v>
-                </c:pt>
-                <c:pt idx="29">
-                  <c:v>41.72</c:v>
-                </c:pt>
-                <c:pt idx="30">
-                  <c:v>38.04</c:v>
-                </c:pt>
-                <c:pt idx="31">
-                  <c:v>39.020000000000003</c:v>
-                </c:pt>
-                <c:pt idx="32">
-                  <c:v>37.06</c:v>
-                </c:pt>
-                <c:pt idx="33">
-                  <c:v>39.08</c:v>
-                </c:pt>
-                <c:pt idx="34">
-                  <c:v>36.57</c:v>
-                </c:pt>
-                <c:pt idx="35">
-                  <c:v>36.21</c:v>
-                </c:pt>
-                <c:pt idx="36">
-                  <c:v>40.44</c:v>
-                </c:pt>
-                <c:pt idx="37">
-                  <c:v>37.49</c:v>
-                </c:pt>
-                <c:pt idx="38">
-                  <c:v>35.79</c:v>
-                </c:pt>
-                <c:pt idx="39">
-                  <c:v>36.81</c:v>
-                </c:pt>
-                <c:pt idx="40">
-                  <c:v>35.61</c:v>
-                </c:pt>
-                <c:pt idx="41">
-                  <c:v>34.46</c:v>
-                </c:pt>
-                <c:pt idx="42">
-                  <c:v>40.56</c:v>
-                </c:pt>
-                <c:pt idx="43">
-                  <c:v>36.86</c:v>
-                </c:pt>
-                <c:pt idx="44">
-                  <c:v>41.3</c:v>
-                </c:pt>
-                <c:pt idx="45">
-                  <c:v>41.22</c:v>
-                </c:pt>
-                <c:pt idx="46">
-                  <c:v>35.130000000000003</c:v>
-                </c:pt>
-                <c:pt idx="47">
-                  <c:v>40.96</c:v>
-                </c:pt>
-                <c:pt idx="48">
-                  <c:v>38.08</c:v>
-                </c:pt>
-                <c:pt idx="49">
-                  <c:v>40.71</c:v>
-                </c:pt>
-                <c:pt idx="50">
-                  <c:v>39.729999999999997</c:v>
-                </c:pt>
-                <c:pt idx="51">
-                  <c:v>36.1</c:v>
-                </c:pt>
-                <c:pt idx="52">
-                  <c:v>38.950000000000003</c:v>
-                </c:pt>
-                <c:pt idx="53">
-                  <c:v>35</c:v>
-                </c:pt>
-                <c:pt idx="54">
-                  <c:v>35.380000000000003</c:v>
-                </c:pt>
-                <c:pt idx="55">
-                  <c:v>38.51</c:v>
-                </c:pt>
-                <c:pt idx="56">
-                  <c:v>33.96</c:v>
-                </c:pt>
-                <c:pt idx="57">
-                  <c:v>35.590000000000003</c:v>
-                </c:pt>
-                <c:pt idx="58">
-                  <c:v>38.82</c:v>
-                </c:pt>
-                <c:pt idx="59">
-                  <c:v>34.26</c:v>
-                </c:pt>
-                <c:pt idx="60">
-                  <c:v>38.86</c:v>
-                </c:pt>
-                <c:pt idx="61">
-                  <c:v>37.840000000000003</c:v>
-                </c:pt>
-                <c:pt idx="62">
-                  <c:v>34.67</c:v>
-                </c:pt>
-                <c:pt idx="63">
-                  <c:v>38.97</c:v>
-                </c:pt>
-                <c:pt idx="64">
-                  <c:v>36.130000000000003</c:v>
-                </c:pt>
-                <c:pt idx="65">
-                  <c:v>35.659999999999997</c:v>
-                </c:pt>
-                <c:pt idx="66">
-                  <c:v>40.68</c:v>
-                </c:pt>
-                <c:pt idx="67">
-                  <c:v>39.6</c:v>
-                </c:pt>
-                <c:pt idx="68">
-                  <c:v>40.61</c:v>
-                </c:pt>
-                <c:pt idx="69">
-                  <c:v>38.22</c:v>
-                </c:pt>
-                <c:pt idx="70">
-                  <c:v>40.19</c:v>
-                </c:pt>
-                <c:pt idx="71">
-                  <c:v>37.29</c:v>
-                </c:pt>
-                <c:pt idx="72">
-                  <c:v>39.85</c:v>
-                </c:pt>
-                <c:pt idx="73">
-                  <c:v>42.54</c:v>
-                </c:pt>
-                <c:pt idx="74">
-                  <c:v>37.479999999999997</c:v>
-                </c:pt>
-                <c:pt idx="75">
-                  <c:v>37.82</c:v>
-                </c:pt>
-                <c:pt idx="76">
-                  <c:v>33.44</c:v>
-                </c:pt>
-                <c:pt idx="77">
-                  <c:v>37.020000000000003</c:v>
-                </c:pt>
-                <c:pt idx="78">
-                  <c:v>38.04</c:v>
-                </c:pt>
-                <c:pt idx="79">
-                  <c:v>37.229999999999997</c:v>
-                </c:pt>
-                <c:pt idx="80">
-                  <c:v>34.86</c:v>
-                </c:pt>
-                <c:pt idx="81">
-                  <c:v>42.07</c:v>
-                </c:pt>
-                <c:pt idx="82">
-                  <c:v>37.700000000000003</c:v>
-                </c:pt>
-                <c:pt idx="83">
-                  <c:v>35.79</c:v>
-                </c:pt>
-                <c:pt idx="84">
-                  <c:v>35.92</c:v>
-                </c:pt>
-                <c:pt idx="85">
-                  <c:v>36.25</c:v>
-                </c:pt>
-              </c:numCache>
-            </c:numRef>
-          </c:yVal>
-          <c:smooth val="0"/>
-          <c:extLst>
-            <c:ext xmlns:c16="http://schemas.microsoft.com/office/drawing/2014/chart" uri="{C3380CC4-5D6E-409C-BE32-E72D297353CC}">
-              <c16:uniqueId val="{00000000-EA05-4415-AC19-A4ADC8146420}"/>
-            </c:ext>
-          </c:extLst>
-        </c:ser>
-        <c:dLbls>
-          <c:showLegendKey val="0"/>
-          <c:showVal val="0"/>
-          <c:showCatName val="0"/>
-          <c:showSerName val="0"/>
-          <c:showPercent val="0"/>
-          <c:showBubbleSize val="0"/>
-        </c:dLbls>
-        <c:axId val="498062240"/>
-        <c:axId val="498062656"/>
-      </c:scatterChart>
-      <c:valAx>
-        <c:axId val="498062240"/>
-        <c:scaling>
-          <c:orientation val="minMax"/>
-          <c:min val="0"/>
-        </c:scaling>
-        <c:delete val="0"/>
-        <c:axPos val="b"/>
-        <c:title>
-          <c:tx>
-            <c:rich>
-              <a:bodyPr rot="0" spcFirstLastPara="1" vertOverflow="ellipsis" vert="horz" wrap="square" anchor="ctr" anchorCtr="1"/>
-              <a:lstStyle/>
-              <a:p>
-                <a:pPr>
-                  <a:defRPr sz="1800" b="1" i="0" u="none" strike="noStrike" kern="1200" baseline="0">
-                    <a:solidFill>
-                      <a:sysClr val="windowText" lastClr="000000"/>
-                    </a:solidFill>
-                    <a:latin typeface="+mn-lt"/>
-                    <a:ea typeface="+mn-ea"/>
-                    <a:cs typeface="+mn-cs"/>
-                  </a:defRPr>
-                </a:pPr>
-                <a:r>
-                  <a:rPr lang="es-ES" sz="1800" b="1" i="1" baseline="0">
-                    <a:solidFill>
-                      <a:sysClr val="windowText" lastClr="000000"/>
-                    </a:solidFill>
-                  </a:rPr>
-                  <a:t>F</a:t>
-                </a:r>
-                <a:endParaRPr lang="es-ES" sz="1800" b="1" i="1" baseline="-25000">
-                  <a:solidFill>
-                    <a:sysClr val="windowText" lastClr="000000"/>
-                  </a:solidFill>
-                </a:endParaRPr>
-              </a:p>
-            </c:rich>
-          </c:tx>
-          <c:layout/>
-          <c:overlay val="0"/>
-          <c:spPr>
-            <a:noFill/>
-            <a:ln>
-              <a:noFill/>
-            </a:ln>
-            <a:effectLst/>
-          </c:spPr>
-          <c:txPr>
-            <a:bodyPr rot="0" spcFirstLastPara="1" vertOverflow="ellipsis" vert="horz" wrap="square" anchor="ctr" anchorCtr="1"/>
-            <a:lstStyle/>
-            <a:p>
-              <a:pPr>
-                <a:defRPr sz="1800" b="1" i="0" u="none" strike="noStrike" kern="1200" baseline="0">
-                  <a:solidFill>
-                    <a:sysClr val="windowText" lastClr="000000"/>
-                  </a:solidFill>
-                  <a:latin typeface="+mn-lt"/>
-                  <a:ea typeface="+mn-ea"/>
-                  <a:cs typeface="+mn-cs"/>
-                </a:defRPr>
-              </a:pPr>
-              <a:endParaRPr lang="es-ES"/>
-            </a:p>
-          </c:txPr>
-        </c:title>
-        <c:numFmt formatCode="General" sourceLinked="1"/>
-        <c:majorTickMark val="none"/>
-        <c:minorTickMark val="none"/>
-        <c:tickLblPos val="nextTo"/>
-        <c:spPr>
-          <a:noFill/>
-          <a:ln w="19050" cap="flat" cmpd="sng" algn="ctr">
-            <a:solidFill>
-              <a:schemeClr val="tx1"/>
-            </a:solidFill>
-            <a:round/>
-          </a:ln>
-          <a:effectLst/>
-        </c:spPr>
-        <c:txPr>
-          <a:bodyPr rot="-60000000" spcFirstLastPara="1" vertOverflow="ellipsis" vert="horz" wrap="square" anchor="ctr" anchorCtr="1"/>
-          <a:lstStyle/>
-          <a:p>
-            <a:pPr>
-              <a:defRPr sz="1400" b="1" i="0" u="none" strike="noStrike" kern="1200" baseline="0">
-                <a:solidFill>
-                  <a:sysClr val="windowText" lastClr="000000"/>
-                </a:solidFill>
-                <a:latin typeface="+mn-lt"/>
-                <a:ea typeface="+mn-ea"/>
-                <a:cs typeface="+mn-cs"/>
-              </a:defRPr>
-            </a:pPr>
-            <a:endParaRPr lang="es-ES"/>
-          </a:p>
-        </c:txPr>
-        <c:crossAx val="498062656"/>
-        <c:crossesAt val="-0.25"/>
-        <c:crossBetween val="midCat"/>
-        <c:majorUnit val="2.5000000000000005E-2"/>
-      </c:valAx>
-      <c:valAx>
-        <c:axId val="498062656"/>
-        <c:scaling>
-          <c:orientation val="minMax"/>
-          <c:max val="45"/>
-          <c:min val="30"/>
-        </c:scaling>
-        <c:delete val="0"/>
-        <c:axPos val="l"/>
-        <c:title>
-          <c:tx>
-            <c:rich>
-              <a:bodyPr rot="-5400000" spcFirstLastPara="1" vertOverflow="ellipsis" vert="horz" wrap="square" anchor="ctr" anchorCtr="1"/>
-              <a:lstStyle/>
-              <a:p>
-                <a:pPr>
-                  <a:defRPr sz="1000" b="0" i="0" u="none" strike="noStrike" kern="1200" baseline="0">
-                    <a:solidFill>
-                      <a:sysClr val="windowText" lastClr="000000"/>
-                    </a:solidFill>
-                    <a:latin typeface="+mn-lt"/>
-                    <a:ea typeface="+mn-ea"/>
-                    <a:cs typeface="+mn-cs"/>
-                  </a:defRPr>
-                </a:pPr>
-                <a:r>
-                  <a:rPr lang="es-ES" sz="1400" b="1">
-                    <a:solidFill>
-                      <a:sysClr val="windowText" lastClr="000000"/>
-                    </a:solidFill>
-                  </a:rPr>
-                  <a:t>Length </a:t>
-                </a:r>
-              </a:p>
-            </c:rich>
-          </c:tx>
-          <c:layout>
-            <c:manualLayout>
-              <c:xMode val="edge"/>
-              <c:yMode val="edge"/>
-              <c:x val="3.6111111111111108E-2"/>
-              <c:y val="0.35110710119568389"/>
-            </c:manualLayout>
-          </c:layout>
-          <c:overlay val="0"/>
-          <c:spPr>
-            <a:noFill/>
-            <a:ln>
-              <a:noFill/>
-            </a:ln>
-            <a:effectLst/>
-          </c:spPr>
-          <c:txPr>
-            <a:bodyPr rot="-5400000" spcFirstLastPara="1" vertOverflow="ellipsis" vert="horz" wrap="square" anchor="ctr" anchorCtr="1"/>
-            <a:lstStyle/>
-            <a:p>
-              <a:pPr>
-                <a:defRPr sz="1000" b="0" i="0" u="none" strike="noStrike" kern="1200" baseline="0">
-                  <a:solidFill>
-                    <a:sysClr val="windowText" lastClr="000000"/>
-                  </a:solidFill>
-                  <a:latin typeface="+mn-lt"/>
-                  <a:ea typeface="+mn-ea"/>
-                  <a:cs typeface="+mn-cs"/>
-                </a:defRPr>
-              </a:pPr>
-              <a:endParaRPr lang="es-ES"/>
-            </a:p>
-          </c:txPr>
-        </c:title>
-        <c:numFmt formatCode="General" sourceLinked="1"/>
-        <c:majorTickMark val="none"/>
-        <c:minorTickMark val="none"/>
-        <c:tickLblPos val="nextTo"/>
-        <c:spPr>
-          <a:noFill/>
-          <a:ln w="19050" cap="flat" cmpd="sng" algn="ctr">
-            <a:solidFill>
-              <a:schemeClr val="tx1"/>
-            </a:solidFill>
-            <a:round/>
-          </a:ln>
-          <a:effectLst/>
-        </c:spPr>
-        <c:txPr>
-          <a:bodyPr rot="-60000000" spcFirstLastPara="1" vertOverflow="ellipsis" vert="horz" wrap="square" anchor="ctr" anchorCtr="1"/>
-          <a:lstStyle/>
-          <a:p>
-            <a:pPr>
-              <a:defRPr sz="1400" b="1" i="0" u="none" strike="noStrike" kern="1200" baseline="0">
-                <a:solidFill>
-                  <a:sysClr val="windowText" lastClr="000000"/>
-                </a:solidFill>
-                <a:latin typeface="+mn-lt"/>
-                <a:ea typeface="+mn-ea"/>
-                <a:cs typeface="+mn-cs"/>
-              </a:defRPr>
-            </a:pPr>
-            <a:endParaRPr lang="es-ES"/>
-          </a:p>
-        </c:txPr>
-        <c:crossAx val="498062240"/>
-        <c:crossesAt val="-0.25"/>
-        <c:crossBetween val="midCat"/>
-      </c:valAx>
-      <c:spPr>
-        <a:noFill/>
-        <a:ln>
-          <a:noFill/>
-        </a:ln>
-        <a:effectLst/>
-      </c:spPr>
-    </c:plotArea>
-    <c:plotVisOnly val="1"/>
-    <c:dispBlanksAs val="gap"/>
-    <c:showDLblsOverMax val="0"/>
-  </c:chart>
-  <c:spPr>
-    <a:solidFill>
-      <a:schemeClr val="bg1"/>
-    </a:solidFill>
-    <a:ln w="9525" cap="flat" cmpd="sng" algn="ctr">
-      <a:noFill/>
-      <a:round/>
-    </a:ln>
-    <a:effectLst/>
-  </c:spPr>
-  <c:txPr>
-    <a:bodyPr/>
-    <a:lstStyle/>
-    <a:p>
-      <a:pPr>
-        <a:defRPr/>
-      </a:pPr>
-      <a:endParaRPr lang="es-ES"/>
-    </a:p>
-  </c:txPr>
-  <c:externalData r:id="rId3">
-    <c:autoUpdate val="0"/>
-  </c:externalData>
-</c:chartSpace>
-</file>
-
-<file path=ppt/charts/chart2.xml><?xml version="1.0" encoding="utf-8"?>
-<c:chartSpace xmlns:c="http://schemas.openxmlformats.org/drawingml/2006/chart" xmlns:a="http://schemas.openxmlformats.org/drawingml/2006/main" xmlns:r="http://schemas.openxmlformats.org/officeDocument/2006/relationships" xmlns:c16r2="http://schemas.microsoft.com/office/drawing/2015/06/chart">
-  <c:date1904 val="0"/>
-  <c:lang val="es-ES"/>
-  <c:roundedCorners val="0"/>
-  <mc:AlternateContent xmlns:mc="http://schemas.openxmlformats.org/markup-compatibility/2006">
-    <mc:Choice xmlns:c14="http://schemas.microsoft.com/office/drawing/2007/8/2/chart" Requires="c14">
-      <c14:style val="102"/>
-    </mc:Choice>
-    <mc:Fallback>
-      <c:style val="2"/>
-    </mc:Fallback>
-  </mc:AlternateContent>
-  <c:chart>
-    <c:title>
-      <c:tx>
-        <c:rich>
-          <a:bodyPr rot="0" spcFirstLastPara="1" vertOverflow="ellipsis" vert="horz" wrap="square" anchor="ctr" anchorCtr="1"/>
-          <a:lstStyle/>
-          <a:p>
-            <a:pPr>
-              <a:defRPr sz="1600" b="1" i="1" u="none" strike="noStrike" kern="1200" spc="0" baseline="0">
-                <a:solidFill>
-                  <a:sysClr val="windowText" lastClr="000000"/>
-                </a:solidFill>
-                <a:latin typeface="+mn-lt"/>
-                <a:ea typeface="+mn-ea"/>
-                <a:cs typeface="+mn-cs"/>
-              </a:defRPr>
-            </a:pPr>
-            <a:r>
-              <a:rPr lang="es-ES" sz="1600" b="1" i="0" u="none" strike="noStrike" baseline="0">
-                <a:solidFill>
-                  <a:sysClr val="windowText" lastClr="000000"/>
-                </a:solidFill>
-                <a:effectLst/>
-              </a:rPr>
               <a:t>(B) </a:t>
             </a:r>
             <a:r>
@@ -1796,6 +853,950 @@
 </c:chartSpace>
 </file>
 
+<file path=ppt/charts/chart2.xml><?xml version="1.0" encoding="utf-8"?>
+<c:chartSpace xmlns:c="http://schemas.openxmlformats.org/drawingml/2006/chart" xmlns:a="http://schemas.openxmlformats.org/drawingml/2006/main" xmlns:r="http://schemas.openxmlformats.org/officeDocument/2006/relationships" xmlns:c16r2="http://schemas.microsoft.com/office/drawing/2015/06/chart">
+  <c:date1904 val="0"/>
+  <c:lang val="es-ES"/>
+  <c:roundedCorners val="0"/>
+  <mc:AlternateContent xmlns:mc="http://schemas.openxmlformats.org/markup-compatibility/2006">
+    <mc:Choice xmlns:c14="http://schemas.microsoft.com/office/drawing/2007/8/2/chart" Requires="c14">
+      <c14:style val="102"/>
+    </mc:Choice>
+    <mc:Fallback>
+      <c:style val="2"/>
+    </mc:Fallback>
+  </mc:AlternateContent>
+  <c:chart>
+    <c:title>
+      <c:tx>
+        <c:rich>
+          <a:bodyPr rot="0" spcFirstLastPara="1" vertOverflow="ellipsis" vert="horz" wrap="square" anchor="ctr" anchorCtr="1"/>
+          <a:lstStyle/>
+          <a:p>
+            <a:pPr>
+              <a:defRPr sz="1600" b="1" i="1" u="none" strike="noStrike" kern="1200" spc="0" baseline="0">
+                <a:solidFill>
+                  <a:sysClr val="windowText" lastClr="000000"/>
+                </a:solidFill>
+                <a:latin typeface="+mn-lt"/>
+                <a:ea typeface="+mn-ea"/>
+                <a:cs typeface="+mn-cs"/>
+              </a:defRPr>
+            </a:pPr>
+            <a:r>
+              <a:rPr lang="es-ES" sz="1600" b="1" i="0" u="none" strike="noStrike" baseline="0">
+                <a:solidFill>
+                  <a:sysClr val="windowText" lastClr="000000"/>
+                </a:solidFill>
+                <a:effectLst/>
+              </a:rPr>
+              <a:t>(A) </a:t>
+            </a:r>
+            <a:r>
+              <a:rPr lang="es-ES" sz="1600" b="1" i="1" u="none" strike="noStrike" baseline="0">
+                <a:solidFill>
+                  <a:sysClr val="windowText" lastClr="000000"/>
+                </a:solidFill>
+                <a:effectLst/>
+              </a:rPr>
+              <a:t>Ruditapes philippinarum</a:t>
+            </a:r>
+            <a:endParaRPr lang="es-ES" sz="1600" b="1" i="1">
+              <a:solidFill>
+                <a:sysClr val="windowText" lastClr="000000"/>
+              </a:solidFill>
+            </a:endParaRPr>
+          </a:p>
+        </c:rich>
+      </c:tx>
+      <c:layout>
+        <c:manualLayout>
+          <c:xMode val="edge"/>
+          <c:yMode val="edge"/>
+          <c:x val="0.28171522309711289"/>
+          <c:y val="2.7777777777777776E-2"/>
+        </c:manualLayout>
+      </c:layout>
+      <c:overlay val="0"/>
+      <c:spPr>
+        <a:noFill/>
+        <a:ln>
+          <a:noFill/>
+        </a:ln>
+        <a:effectLst/>
+      </c:spPr>
+      <c:txPr>
+        <a:bodyPr rot="0" spcFirstLastPara="1" vertOverflow="ellipsis" vert="horz" wrap="square" anchor="ctr" anchorCtr="1"/>
+        <a:lstStyle/>
+        <a:p>
+          <a:pPr>
+            <a:defRPr sz="1600" b="1" i="1" u="none" strike="noStrike" kern="1200" spc="0" baseline="0">
+              <a:solidFill>
+                <a:sysClr val="windowText" lastClr="000000"/>
+              </a:solidFill>
+              <a:latin typeface="+mn-lt"/>
+              <a:ea typeface="+mn-ea"/>
+              <a:cs typeface="+mn-cs"/>
+            </a:defRPr>
+          </a:pPr>
+          <a:endParaRPr lang="es-ES"/>
+        </a:p>
+      </c:txPr>
+    </c:title>
+    <c:autoTitleDeleted val="0"/>
+    <c:plotArea>
+      <c:layout>
+        <c:manualLayout>
+          <c:layoutTarget val="inner"/>
+          <c:xMode val="edge"/>
+          <c:yMode val="edge"/>
+          <c:x val="0.21046762904636918"/>
+          <c:y val="0.1947914843977836"/>
+          <c:w val="0.67977537182852132"/>
+          <c:h val="0.52277048702245554"/>
+        </c:manualLayout>
+      </c:layout>
+      <c:scatterChart>
+        <c:scatterStyle val="lineMarker"/>
+        <c:varyColors val="0"/>
+        <c:ser>
+          <c:idx val="0"/>
+          <c:order val="0"/>
+          <c:spPr>
+            <a:ln w="25400" cap="rnd">
+              <a:noFill/>
+              <a:round/>
+            </a:ln>
+            <a:effectLst/>
+          </c:spPr>
+          <c:marker>
+            <c:symbol val="circle"/>
+            <c:size val="6"/>
+            <c:spPr>
+              <a:solidFill>
+                <a:srgbClr val="0070C0"/>
+              </a:solidFill>
+              <a:ln w="9525">
+                <a:solidFill>
+                  <a:srgbClr val="0070C0"/>
+                </a:solidFill>
+              </a:ln>
+              <a:effectLst/>
+            </c:spPr>
+          </c:marker>
+          <c:trendline>
+            <c:spPr>
+              <a:ln w="31750" cap="rnd">
+                <a:solidFill>
+                  <a:srgbClr val="FF0000"/>
+                </a:solidFill>
+                <a:prstDash val="solid"/>
+              </a:ln>
+              <a:effectLst/>
+            </c:spPr>
+            <c:trendlineType val="linear"/>
+            <c:dispRSqr val="0"/>
+            <c:dispEq val="0"/>
+          </c:trendline>
+          <c:xVal>
+            <c:numRef>
+              <c:f>'Inbreeding parents clams'!$M$2:$M$87</c:f>
+              <c:numCache>
+                <c:formatCode>General</c:formatCode>
+                <c:ptCount val="86"/>
+                <c:pt idx="0">
+                  <c:v>-3.506E-3</c:v>
+                </c:pt>
+                <c:pt idx="1">
+                  <c:v>7.3868000000000003E-2</c:v>
+                </c:pt>
+                <c:pt idx="2">
+                  <c:v>5.0209999999999998E-2</c:v>
+                </c:pt>
+                <c:pt idx="3">
+                  <c:v>4.8550000000000003E-2</c:v>
+                </c:pt>
+                <c:pt idx="4">
+                  <c:v>7.6110999999999998E-2</c:v>
+                </c:pt>
+                <c:pt idx="5">
+                  <c:v>-5.0615E-2</c:v>
+                </c:pt>
+                <c:pt idx="6">
+                  <c:v>2.5264999999999999E-2</c:v>
+                </c:pt>
+                <c:pt idx="7">
+                  <c:v>5.7069000000000002E-2</c:v>
+                </c:pt>
+                <c:pt idx="8">
+                  <c:v>7.5239E-2</c:v>
+                </c:pt>
+                <c:pt idx="9">
+                  <c:v>8.1988000000000005E-2</c:v>
+                </c:pt>
+                <c:pt idx="10">
+                  <c:v>3.6008999999999999E-2</c:v>
+                </c:pt>
+                <c:pt idx="11">
+                  <c:v>1.0361E-2</c:v>
+                </c:pt>
+                <c:pt idx="12">
+                  <c:v>3.3397999999999997E-2</c:v>
+                </c:pt>
+                <c:pt idx="13">
+                  <c:v>4.1079999999999997E-3</c:v>
+                </c:pt>
+                <c:pt idx="14">
+                  <c:v>-4.28E-3</c:v>
+                </c:pt>
+                <c:pt idx="15">
+                  <c:v>5.8209999999999998E-2</c:v>
+                </c:pt>
+                <c:pt idx="16">
+                  <c:v>5.9781000000000001E-2</c:v>
+                </c:pt>
+                <c:pt idx="17">
+                  <c:v>4.6309000000000003E-2</c:v>
+                </c:pt>
+                <c:pt idx="18">
+                  <c:v>4.0603E-2</c:v>
+                </c:pt>
+                <c:pt idx="19">
+                  <c:v>4.3715999999999998E-2</c:v>
+                </c:pt>
+                <c:pt idx="20">
+                  <c:v>2.2761E-2</c:v>
+                </c:pt>
+                <c:pt idx="21">
+                  <c:v>9.9270000000000001E-3</c:v>
+                </c:pt>
+                <c:pt idx="22">
+                  <c:v>3.4058999999999999E-2</c:v>
+                </c:pt>
+                <c:pt idx="23">
+                  <c:v>2.8809999999999999E-2</c:v>
+                </c:pt>
+                <c:pt idx="24">
+                  <c:v>4.5182E-2</c:v>
+                </c:pt>
+                <c:pt idx="25">
+                  <c:v>-2.405E-3</c:v>
+                </c:pt>
+                <c:pt idx="26">
+                  <c:v>3.8150999999999997E-2</c:v>
+                </c:pt>
+                <c:pt idx="27">
+                  <c:v>-8.5079999999999999E-3</c:v>
+                </c:pt>
+                <c:pt idx="28">
+                  <c:v>2.845E-2</c:v>
+                </c:pt>
+                <c:pt idx="29">
+                  <c:v>4.1787999999999999E-2</c:v>
+                </c:pt>
+                <c:pt idx="30">
+                  <c:v>-3.4924999999999998E-2</c:v>
+                </c:pt>
+                <c:pt idx="31">
+                  <c:v>6.4011999999999999E-2</c:v>
+                </c:pt>
+                <c:pt idx="32">
+                  <c:v>5.4703000000000002E-2</c:v>
+                </c:pt>
+                <c:pt idx="33">
+                  <c:v>2.5969999999999999E-3</c:v>
+                </c:pt>
+                <c:pt idx="34">
+                  <c:v>6.0472999999999999E-2</c:v>
+                </c:pt>
+                <c:pt idx="35">
+                  <c:v>4.3618999999999998E-2</c:v>
+                </c:pt>
+                <c:pt idx="36">
+                  <c:v>-1.231E-2</c:v>
+                </c:pt>
+                <c:pt idx="37">
+                  <c:v>-2.3195E-2</c:v>
+                </c:pt>
+                <c:pt idx="38">
+                  <c:v>2.2683999999999999E-2</c:v>
+                </c:pt>
+                <c:pt idx="39">
+                  <c:v>2.8518999999999999E-2</c:v>
+                </c:pt>
+                <c:pt idx="40">
+                  <c:v>5.4627000000000002E-2</c:v>
+                </c:pt>
+                <c:pt idx="41">
+                  <c:v>3.2807999999999997E-2</c:v>
+                </c:pt>
+                <c:pt idx="42">
+                  <c:v>4.6455999999999997E-2</c:v>
+                </c:pt>
+                <c:pt idx="43">
+                  <c:v>8.3929999999999994E-3</c:v>
+                </c:pt>
+                <c:pt idx="44">
+                  <c:v>-3.2795999999999999E-2</c:v>
+                </c:pt>
+                <c:pt idx="45">
+                  <c:v>6.5534999999999996E-2</c:v>
+                </c:pt>
+                <c:pt idx="46">
+                  <c:v>4.8725999999999998E-2</c:v>
+                </c:pt>
+                <c:pt idx="47">
+                  <c:v>2.9079000000000001E-2</c:v>
+                </c:pt>
+                <c:pt idx="48">
+                  <c:v>3.6470000000000002E-2</c:v>
+                </c:pt>
+                <c:pt idx="49">
+                  <c:v>-5.241E-3</c:v>
+                </c:pt>
+                <c:pt idx="50">
+                  <c:v>9.4783000000000006E-2</c:v>
+                </c:pt>
+                <c:pt idx="51">
+                  <c:v>4.1978000000000001E-2</c:v>
+                </c:pt>
+                <c:pt idx="52">
+                  <c:v>8.3700999999999998E-2</c:v>
+                </c:pt>
+                <c:pt idx="53">
+                  <c:v>3.9510000000000003E-2</c:v>
+                </c:pt>
+                <c:pt idx="54">
+                  <c:v>3.9649999999999998E-2</c:v>
+                </c:pt>
+                <c:pt idx="55">
+                  <c:v>6.9248000000000004E-2</c:v>
+                </c:pt>
+                <c:pt idx="56">
+                  <c:v>5.3572000000000002E-2</c:v>
+                </c:pt>
+                <c:pt idx="57">
+                  <c:v>3.6739000000000001E-2</c:v>
+                </c:pt>
+                <c:pt idx="58">
+                  <c:v>5.4754999999999998E-2</c:v>
+                </c:pt>
+                <c:pt idx="59">
+                  <c:v>6.7171999999999996E-2</c:v>
+                </c:pt>
+                <c:pt idx="60">
+                  <c:v>1.6004999999999998E-2</c:v>
+                </c:pt>
+                <c:pt idx="61">
+                  <c:v>5.5389000000000001E-2</c:v>
+                </c:pt>
+                <c:pt idx="62">
+                  <c:v>3.2661000000000003E-2</c:v>
+                </c:pt>
+                <c:pt idx="63">
+                  <c:v>5.6009000000000003E-2</c:v>
+                </c:pt>
+                <c:pt idx="64">
+                  <c:v>3.0640000000000001E-2</c:v>
+                </c:pt>
+                <c:pt idx="65">
+                  <c:v>4.4865000000000002E-2</c:v>
+                </c:pt>
+                <c:pt idx="66">
+                  <c:v>4.8495999999999997E-2</c:v>
+                </c:pt>
+                <c:pt idx="67">
+                  <c:v>2.4251000000000002E-2</c:v>
+                </c:pt>
+                <c:pt idx="68">
+                  <c:v>4.2154999999999998E-2</c:v>
+                </c:pt>
+                <c:pt idx="69">
+                  <c:v>6.3949000000000006E-2</c:v>
+                </c:pt>
+                <c:pt idx="70">
+                  <c:v>1.5030999999999999E-2</c:v>
+                </c:pt>
+                <c:pt idx="71">
+                  <c:v>1.8870999999999999E-2</c:v>
+                </c:pt>
+                <c:pt idx="72">
+                  <c:v>1.9241999999999999E-2</c:v>
+                </c:pt>
+                <c:pt idx="73">
+                  <c:v>2.2589999999999999E-2</c:v>
+                </c:pt>
+                <c:pt idx="74">
+                  <c:v>3.1130999999999999E-2</c:v>
+                </c:pt>
+                <c:pt idx="75">
+                  <c:v>3.8386000000000003E-2</c:v>
+                </c:pt>
+                <c:pt idx="76">
+                  <c:v>3.2615999999999999E-2</c:v>
+                </c:pt>
+                <c:pt idx="77">
+                  <c:v>1.0436000000000001E-2</c:v>
+                </c:pt>
+                <c:pt idx="78">
+                  <c:v>4.0391999999999997E-2</c:v>
+                </c:pt>
+                <c:pt idx="79">
+                  <c:v>2.2093000000000002E-2</c:v>
+                </c:pt>
+                <c:pt idx="80">
+                  <c:v>3.1461999999999997E-2</c:v>
+                </c:pt>
+                <c:pt idx="81">
+                  <c:v>3.0511E-2</c:v>
+                </c:pt>
+                <c:pt idx="82">
+                  <c:v>2.6616000000000001E-2</c:v>
+                </c:pt>
+                <c:pt idx="83">
+                  <c:v>6.4321000000000003E-2</c:v>
+                </c:pt>
+                <c:pt idx="84">
+                  <c:v>7.8711000000000003E-2</c:v>
+                </c:pt>
+                <c:pt idx="85">
+                  <c:v>7.0677000000000004E-2</c:v>
+                </c:pt>
+              </c:numCache>
+            </c:numRef>
+          </c:xVal>
+          <c:yVal>
+            <c:numRef>
+              <c:f>'Inbreeding parents clams'!$E$2:$E$87</c:f>
+              <c:numCache>
+                <c:formatCode>General</c:formatCode>
+                <c:ptCount val="86"/>
+                <c:pt idx="0">
+                  <c:v>39.049999999999997</c:v>
+                </c:pt>
+                <c:pt idx="1">
+                  <c:v>35.32</c:v>
+                </c:pt>
+                <c:pt idx="2">
+                  <c:v>40.1</c:v>
+                </c:pt>
+                <c:pt idx="3">
+                  <c:v>35.94</c:v>
+                </c:pt>
+                <c:pt idx="4">
+                  <c:v>39.08</c:v>
+                </c:pt>
+                <c:pt idx="5">
+                  <c:v>38.520000000000003</c:v>
+                </c:pt>
+                <c:pt idx="6">
+                  <c:v>40.39</c:v>
+                </c:pt>
+                <c:pt idx="7">
+                  <c:v>36.85</c:v>
+                </c:pt>
+                <c:pt idx="8">
+                  <c:v>38.74</c:v>
+                </c:pt>
+                <c:pt idx="9">
+                  <c:v>37.28</c:v>
+                </c:pt>
+                <c:pt idx="10">
+                  <c:v>40.06</c:v>
+                </c:pt>
+                <c:pt idx="11">
+                  <c:v>38.64</c:v>
+                </c:pt>
+                <c:pt idx="12">
+                  <c:v>36.56</c:v>
+                </c:pt>
+                <c:pt idx="13">
+                  <c:v>37.659999999999997</c:v>
+                </c:pt>
+                <c:pt idx="14">
+                  <c:v>39.69</c:v>
+                </c:pt>
+                <c:pt idx="15">
+                  <c:v>39.130000000000003</c:v>
+                </c:pt>
+                <c:pt idx="16">
+                  <c:v>39.33</c:v>
+                </c:pt>
+                <c:pt idx="17">
+                  <c:v>36.25</c:v>
+                </c:pt>
+                <c:pt idx="18">
+                  <c:v>37.94</c:v>
+                </c:pt>
+                <c:pt idx="19">
+                  <c:v>37.47</c:v>
+                </c:pt>
+                <c:pt idx="20">
+                  <c:v>35.979999999999997</c:v>
+                </c:pt>
+                <c:pt idx="21">
+                  <c:v>37.75</c:v>
+                </c:pt>
+                <c:pt idx="22">
+                  <c:v>34.35</c:v>
+                </c:pt>
+                <c:pt idx="23">
+                  <c:v>39.549999999999997</c:v>
+                </c:pt>
+                <c:pt idx="24">
+                  <c:v>40.17</c:v>
+                </c:pt>
+                <c:pt idx="25">
+                  <c:v>38.549999999999997</c:v>
+                </c:pt>
+                <c:pt idx="26">
+                  <c:v>40.6</c:v>
+                </c:pt>
+                <c:pt idx="27">
+                  <c:v>44.66</c:v>
+                </c:pt>
+                <c:pt idx="28">
+                  <c:v>39.61</c:v>
+                </c:pt>
+                <c:pt idx="29">
+                  <c:v>41.72</c:v>
+                </c:pt>
+                <c:pt idx="30">
+                  <c:v>38.04</c:v>
+                </c:pt>
+                <c:pt idx="31">
+                  <c:v>39.020000000000003</c:v>
+                </c:pt>
+                <c:pt idx="32">
+                  <c:v>37.06</c:v>
+                </c:pt>
+                <c:pt idx="33">
+                  <c:v>39.08</c:v>
+                </c:pt>
+                <c:pt idx="34">
+                  <c:v>36.57</c:v>
+                </c:pt>
+                <c:pt idx="35">
+                  <c:v>36.21</c:v>
+                </c:pt>
+                <c:pt idx="36">
+                  <c:v>40.44</c:v>
+                </c:pt>
+                <c:pt idx="37">
+                  <c:v>37.49</c:v>
+                </c:pt>
+                <c:pt idx="38">
+                  <c:v>35.79</c:v>
+                </c:pt>
+                <c:pt idx="39">
+                  <c:v>36.81</c:v>
+                </c:pt>
+                <c:pt idx="40">
+                  <c:v>35.61</c:v>
+                </c:pt>
+                <c:pt idx="41">
+                  <c:v>34.46</c:v>
+                </c:pt>
+                <c:pt idx="42">
+                  <c:v>40.56</c:v>
+                </c:pt>
+                <c:pt idx="43">
+                  <c:v>36.86</c:v>
+                </c:pt>
+                <c:pt idx="44">
+                  <c:v>41.3</c:v>
+                </c:pt>
+                <c:pt idx="45">
+                  <c:v>41.22</c:v>
+                </c:pt>
+                <c:pt idx="46">
+                  <c:v>35.130000000000003</c:v>
+                </c:pt>
+                <c:pt idx="47">
+                  <c:v>40.96</c:v>
+                </c:pt>
+                <c:pt idx="48">
+                  <c:v>38.08</c:v>
+                </c:pt>
+                <c:pt idx="49">
+                  <c:v>40.71</c:v>
+                </c:pt>
+                <c:pt idx="50">
+                  <c:v>39.729999999999997</c:v>
+                </c:pt>
+                <c:pt idx="51">
+                  <c:v>36.1</c:v>
+                </c:pt>
+                <c:pt idx="52">
+                  <c:v>38.950000000000003</c:v>
+                </c:pt>
+                <c:pt idx="53">
+                  <c:v>35</c:v>
+                </c:pt>
+                <c:pt idx="54">
+                  <c:v>35.380000000000003</c:v>
+                </c:pt>
+                <c:pt idx="55">
+                  <c:v>38.51</c:v>
+                </c:pt>
+                <c:pt idx="56">
+                  <c:v>33.96</c:v>
+                </c:pt>
+                <c:pt idx="57">
+                  <c:v>35.590000000000003</c:v>
+                </c:pt>
+                <c:pt idx="58">
+                  <c:v>38.82</c:v>
+                </c:pt>
+                <c:pt idx="59">
+                  <c:v>34.26</c:v>
+                </c:pt>
+                <c:pt idx="60">
+                  <c:v>38.86</c:v>
+                </c:pt>
+                <c:pt idx="61">
+                  <c:v>37.840000000000003</c:v>
+                </c:pt>
+                <c:pt idx="62">
+                  <c:v>34.67</c:v>
+                </c:pt>
+                <c:pt idx="63">
+                  <c:v>38.97</c:v>
+                </c:pt>
+                <c:pt idx="64">
+                  <c:v>36.130000000000003</c:v>
+                </c:pt>
+                <c:pt idx="65">
+                  <c:v>35.659999999999997</c:v>
+                </c:pt>
+                <c:pt idx="66">
+                  <c:v>40.68</c:v>
+                </c:pt>
+                <c:pt idx="67">
+                  <c:v>39.6</c:v>
+                </c:pt>
+                <c:pt idx="68">
+                  <c:v>40.61</c:v>
+                </c:pt>
+                <c:pt idx="69">
+                  <c:v>38.22</c:v>
+                </c:pt>
+                <c:pt idx="70">
+                  <c:v>40.19</c:v>
+                </c:pt>
+                <c:pt idx="71">
+                  <c:v>37.29</c:v>
+                </c:pt>
+                <c:pt idx="72">
+                  <c:v>39.85</c:v>
+                </c:pt>
+                <c:pt idx="73">
+                  <c:v>42.54</c:v>
+                </c:pt>
+                <c:pt idx="74">
+                  <c:v>37.479999999999997</c:v>
+                </c:pt>
+                <c:pt idx="75">
+                  <c:v>37.82</c:v>
+                </c:pt>
+                <c:pt idx="76">
+                  <c:v>33.44</c:v>
+                </c:pt>
+                <c:pt idx="77">
+                  <c:v>37.020000000000003</c:v>
+                </c:pt>
+                <c:pt idx="78">
+                  <c:v>38.04</c:v>
+                </c:pt>
+                <c:pt idx="79">
+                  <c:v>37.229999999999997</c:v>
+                </c:pt>
+                <c:pt idx="80">
+                  <c:v>34.86</c:v>
+                </c:pt>
+                <c:pt idx="81">
+                  <c:v>42.07</c:v>
+                </c:pt>
+                <c:pt idx="82">
+                  <c:v>37.700000000000003</c:v>
+                </c:pt>
+                <c:pt idx="83">
+                  <c:v>35.79</c:v>
+                </c:pt>
+                <c:pt idx="84">
+                  <c:v>35.92</c:v>
+                </c:pt>
+                <c:pt idx="85">
+                  <c:v>36.25</c:v>
+                </c:pt>
+              </c:numCache>
+            </c:numRef>
+          </c:yVal>
+          <c:smooth val="0"/>
+          <c:extLst>
+            <c:ext xmlns:c16="http://schemas.microsoft.com/office/drawing/2014/chart" uri="{C3380CC4-5D6E-409C-BE32-E72D297353CC}">
+              <c16:uniqueId val="{00000000-7D9C-45E9-BEEA-EB183B37D443}"/>
+            </c:ext>
+          </c:extLst>
+        </c:ser>
+        <c:dLbls>
+          <c:showLegendKey val="0"/>
+          <c:showVal val="0"/>
+          <c:showCatName val="0"/>
+          <c:showSerName val="0"/>
+          <c:showPercent val="0"/>
+          <c:showBubbleSize val="0"/>
+        </c:dLbls>
+        <c:axId val="498062240"/>
+        <c:axId val="498062656"/>
+      </c:scatterChart>
+      <c:valAx>
+        <c:axId val="498062240"/>
+        <c:scaling>
+          <c:orientation val="minMax"/>
+          <c:max val="0.15000000000000002"/>
+          <c:min val="-0.1"/>
+        </c:scaling>
+        <c:delete val="0"/>
+        <c:axPos val="b"/>
+        <c:title>
+          <c:tx>
+            <c:rich>
+              <a:bodyPr rot="0" spcFirstLastPara="1" vertOverflow="ellipsis" vert="horz" wrap="square" anchor="ctr" anchorCtr="1"/>
+              <a:lstStyle/>
+              <a:p>
+                <a:pPr>
+                  <a:defRPr sz="1800" b="1" i="0" u="none" strike="noStrike" kern="1200" baseline="0">
+                    <a:solidFill>
+                      <a:sysClr val="windowText" lastClr="000000"/>
+                    </a:solidFill>
+                    <a:latin typeface="+mn-lt"/>
+                    <a:ea typeface="+mn-ea"/>
+                    <a:cs typeface="+mn-cs"/>
+                  </a:defRPr>
+                </a:pPr>
+                <a:r>
+                  <a:rPr lang="es-ES" sz="1800" b="1" i="1" baseline="0">
+                    <a:solidFill>
+                      <a:sysClr val="windowText" lastClr="000000"/>
+                    </a:solidFill>
+                  </a:rPr>
+                  <a:t>F</a:t>
+                </a:r>
+                <a:endParaRPr lang="es-ES" sz="1800" b="1" i="1" baseline="-25000">
+                  <a:solidFill>
+                    <a:sysClr val="windowText" lastClr="000000"/>
+                  </a:solidFill>
+                </a:endParaRPr>
+              </a:p>
+            </c:rich>
+          </c:tx>
+          <c:layout/>
+          <c:overlay val="0"/>
+          <c:spPr>
+            <a:noFill/>
+            <a:ln>
+              <a:noFill/>
+            </a:ln>
+            <a:effectLst/>
+          </c:spPr>
+          <c:txPr>
+            <a:bodyPr rot="0" spcFirstLastPara="1" vertOverflow="ellipsis" vert="horz" wrap="square" anchor="ctr" anchorCtr="1"/>
+            <a:lstStyle/>
+            <a:p>
+              <a:pPr>
+                <a:defRPr sz="1800" b="1" i="0" u="none" strike="noStrike" kern="1200" baseline="0">
+                  <a:solidFill>
+                    <a:sysClr val="windowText" lastClr="000000"/>
+                  </a:solidFill>
+                  <a:latin typeface="+mn-lt"/>
+                  <a:ea typeface="+mn-ea"/>
+                  <a:cs typeface="+mn-cs"/>
+                </a:defRPr>
+              </a:pPr>
+              <a:endParaRPr lang="es-ES"/>
+            </a:p>
+          </c:txPr>
+        </c:title>
+        <c:numFmt formatCode="General" sourceLinked="1"/>
+        <c:majorTickMark val="none"/>
+        <c:minorTickMark val="none"/>
+        <c:tickLblPos val="nextTo"/>
+        <c:spPr>
+          <a:noFill/>
+          <a:ln w="19050" cap="flat" cmpd="sng" algn="ctr">
+            <a:solidFill>
+              <a:schemeClr val="tx1"/>
+            </a:solidFill>
+            <a:round/>
+          </a:ln>
+          <a:effectLst/>
+        </c:spPr>
+        <c:txPr>
+          <a:bodyPr rot="-60000000" spcFirstLastPara="1" vertOverflow="ellipsis" vert="horz" wrap="square" anchor="ctr" anchorCtr="1"/>
+          <a:lstStyle/>
+          <a:p>
+            <a:pPr>
+              <a:defRPr sz="1400" b="1" i="0" u="none" strike="noStrike" kern="1200" baseline="0">
+                <a:solidFill>
+                  <a:sysClr val="windowText" lastClr="000000"/>
+                </a:solidFill>
+                <a:latin typeface="+mn-lt"/>
+                <a:ea typeface="+mn-ea"/>
+                <a:cs typeface="+mn-cs"/>
+              </a:defRPr>
+            </a:pPr>
+            <a:endParaRPr lang="es-ES"/>
+          </a:p>
+        </c:txPr>
+        <c:crossAx val="498062656"/>
+        <c:crossesAt val="-0.25"/>
+        <c:crossBetween val="midCat"/>
+        <c:majorUnit val="5.000000000000001E-2"/>
+      </c:valAx>
+      <c:valAx>
+        <c:axId val="498062656"/>
+        <c:scaling>
+          <c:orientation val="minMax"/>
+          <c:max val="45"/>
+          <c:min val="30"/>
+        </c:scaling>
+        <c:delete val="0"/>
+        <c:axPos val="l"/>
+        <c:title>
+          <c:tx>
+            <c:rich>
+              <a:bodyPr rot="-5400000" spcFirstLastPara="1" vertOverflow="ellipsis" vert="horz" wrap="square" anchor="ctr" anchorCtr="1"/>
+              <a:lstStyle/>
+              <a:p>
+                <a:pPr>
+                  <a:defRPr sz="1000" b="0" i="0" u="none" strike="noStrike" kern="1200" baseline="0">
+                    <a:solidFill>
+                      <a:sysClr val="windowText" lastClr="000000"/>
+                    </a:solidFill>
+                    <a:latin typeface="+mn-lt"/>
+                    <a:ea typeface="+mn-ea"/>
+                    <a:cs typeface="+mn-cs"/>
+                  </a:defRPr>
+                </a:pPr>
+                <a:r>
+                  <a:rPr lang="es-ES" sz="1400" b="1">
+                    <a:solidFill>
+                      <a:sysClr val="windowText" lastClr="000000"/>
+                    </a:solidFill>
+                  </a:rPr>
+                  <a:t>Length </a:t>
+                </a:r>
+              </a:p>
+            </c:rich>
+          </c:tx>
+          <c:layout>
+            <c:manualLayout>
+              <c:xMode val="edge"/>
+              <c:yMode val="edge"/>
+              <c:x val="3.6111111111111108E-2"/>
+              <c:y val="0.35110710119568389"/>
+            </c:manualLayout>
+          </c:layout>
+          <c:overlay val="0"/>
+          <c:spPr>
+            <a:noFill/>
+            <a:ln>
+              <a:noFill/>
+            </a:ln>
+            <a:effectLst/>
+          </c:spPr>
+          <c:txPr>
+            <a:bodyPr rot="-5400000" spcFirstLastPara="1" vertOverflow="ellipsis" vert="horz" wrap="square" anchor="ctr" anchorCtr="1"/>
+            <a:lstStyle/>
+            <a:p>
+              <a:pPr>
+                <a:defRPr sz="1000" b="0" i="0" u="none" strike="noStrike" kern="1200" baseline="0">
+                  <a:solidFill>
+                    <a:sysClr val="windowText" lastClr="000000"/>
+                  </a:solidFill>
+                  <a:latin typeface="+mn-lt"/>
+                  <a:ea typeface="+mn-ea"/>
+                  <a:cs typeface="+mn-cs"/>
+                </a:defRPr>
+              </a:pPr>
+              <a:endParaRPr lang="es-ES"/>
+            </a:p>
+          </c:txPr>
+        </c:title>
+        <c:numFmt formatCode="General" sourceLinked="1"/>
+        <c:majorTickMark val="none"/>
+        <c:minorTickMark val="none"/>
+        <c:tickLblPos val="nextTo"/>
+        <c:spPr>
+          <a:noFill/>
+          <a:ln w="19050" cap="flat" cmpd="sng" algn="ctr">
+            <a:solidFill>
+              <a:schemeClr val="tx1"/>
+            </a:solidFill>
+            <a:round/>
+          </a:ln>
+          <a:effectLst/>
+        </c:spPr>
+        <c:txPr>
+          <a:bodyPr rot="-60000000" spcFirstLastPara="1" vertOverflow="ellipsis" vert="horz" wrap="square" anchor="ctr" anchorCtr="1"/>
+          <a:lstStyle/>
+          <a:p>
+            <a:pPr>
+              <a:defRPr sz="1400" b="1" i="0" u="none" strike="noStrike" kern="1200" baseline="0">
+                <a:solidFill>
+                  <a:sysClr val="windowText" lastClr="000000"/>
+                </a:solidFill>
+                <a:latin typeface="+mn-lt"/>
+                <a:ea typeface="+mn-ea"/>
+                <a:cs typeface="+mn-cs"/>
+              </a:defRPr>
+            </a:pPr>
+            <a:endParaRPr lang="es-ES"/>
+          </a:p>
+        </c:txPr>
+        <c:crossAx val="498062240"/>
+        <c:crossesAt val="-0.25"/>
+        <c:crossBetween val="midCat"/>
+      </c:valAx>
+      <c:spPr>
+        <a:noFill/>
+        <a:ln>
+          <a:noFill/>
+        </a:ln>
+        <a:effectLst/>
+      </c:spPr>
+    </c:plotArea>
+    <c:plotVisOnly val="1"/>
+    <c:dispBlanksAs val="gap"/>
+    <c:showDLblsOverMax val="0"/>
+  </c:chart>
+  <c:spPr>
+    <a:solidFill>
+      <a:schemeClr val="bg1"/>
+    </a:solidFill>
+    <a:ln w="9525" cap="flat" cmpd="sng" algn="ctr">
+      <a:noFill/>
+      <a:round/>
+    </a:ln>
+    <a:effectLst/>
+  </c:spPr>
+  <c:txPr>
+    <a:bodyPr/>
+    <a:lstStyle/>
+    <a:p>
+      <a:pPr>
+        <a:defRPr/>
+      </a:pPr>
+      <a:endParaRPr lang="es-ES"/>
+    </a:p>
+  </c:txPr>
+  <c:externalData r:id="rId3">
+    <c:autoUpdate val="0"/>
+  </c:externalData>
+</c:chartSpace>
+</file>
+
 <file path=ppt/charts/chart3.xml><?xml version="1.0" encoding="utf-8"?>
 <c:chartSpace xmlns:c="http://schemas.openxmlformats.org/drawingml/2006/chart" xmlns:a="http://schemas.openxmlformats.org/drawingml/2006/main" xmlns:r="http://schemas.openxmlformats.org/officeDocument/2006/relationships" xmlns:c16r2="http://schemas.microsoft.com/office/drawing/2015/06/chart">
   <c:date1904 val="0"/>
@@ -1844,7 +1845,6 @@
           </a:p>
         </c:rich>
       </c:tx>
-      <c:layout/>
       <c:overlay val="0"/>
       <c:spPr>
         <a:noFill/>
@@ -2016,7 +2016,6 @@
               </a:p>
             </c:rich>
           </c:tx>
-          <c:layout/>
           <c:overlay val="0"/>
           <c:spPr>
             <a:noFill/>
@@ -2121,7 +2120,6 @@
               </a:p>
             </c:rich>
           </c:tx>
-          <c:layout/>
           <c:overlay val="0"/>
           <c:spPr>
             <a:noFill/>
@@ -2271,7 +2269,6 @@
           </a:p>
         </c:rich>
       </c:tx>
-      <c:layout/>
       <c:overlay val="0"/>
       <c:spPr>
         <a:noFill/>
@@ -2437,7 +2434,6 @@
               </a:p>
             </c:rich>
           </c:tx>
-          <c:layout/>
           <c:overlay val="0"/>
           <c:spPr>
             <a:noFill/>
@@ -2542,7 +2538,6 @@
               </a:p>
             </c:rich>
           </c:tx>
-          <c:layout/>
           <c:overlay val="0"/>
           <c:spPr>
             <a:noFill/>
@@ -2692,6 +2687,7 @@
           </a:p>
         </c:rich>
       </c:tx>
+      <c:layout/>
       <c:overlay val="0"/>
       <c:spPr>
         <a:noFill/>
@@ -2822,7 +2818,7 @@
           <c:smooth val="0"/>
           <c:extLst>
             <c:ext xmlns:c16="http://schemas.microsoft.com/office/drawing/2014/chart" uri="{C3380CC4-5D6E-409C-BE32-E72D297353CC}">
-              <c16:uniqueId val="{00000000-95CD-4759-A67A-8AA89C12FA93}"/>
+              <c16:uniqueId val="{00000000-4881-4E87-AF54-7B7C0A0AD81A}"/>
             </c:ext>
           </c:extLst>
         </c:ser>
@@ -2916,7 +2912,7 @@
           <c:smooth val="0"/>
           <c:extLst>
             <c:ext xmlns:c16="http://schemas.microsoft.com/office/drawing/2014/chart" uri="{C3380CC4-5D6E-409C-BE32-E72D297353CC}">
-              <c16:uniqueId val="{00000001-95CD-4759-A67A-8AA89C12FA93}"/>
+              <c16:uniqueId val="{00000001-4881-4E87-AF54-7B7C0A0AD81A}"/>
             </c:ext>
           </c:extLst>
         </c:ser>
@@ -2964,8 +2960,8 @@
             <c:trendlineLbl>
               <c:layout>
                 <c:manualLayout>
-                  <c:x val="-7.1188629233459533E-2"/>
-                  <c:y val="-0.36564085739282592"/>
+                  <c:x val="-7.3222019991629597E-2"/>
+                  <c:y val="-0.38724579566443085"/>
                 </c:manualLayout>
               </c:layout>
               <c:numFmt formatCode="General" sourceLinked="0"/>
@@ -3382,7 +3378,7 @@
           <c:smooth val="0"/>
           <c:extLst>
             <c:ext xmlns:c16="http://schemas.microsoft.com/office/drawing/2014/chart" uri="{C3380CC4-5D6E-409C-BE32-E72D297353CC}">
-              <c16:uniqueId val="{00000002-95CD-4759-A67A-8AA89C12FA93}"/>
+              <c16:uniqueId val="{00000002-4881-4E87-AF54-7B7C0A0AD81A}"/>
             </c:ext>
           </c:extLst>
         </c:ser>
@@ -3428,8 +3424,8 @@
             <c:trendlineLbl>
               <c:layout>
                 <c:manualLayout>
-                  <c:x val="-0.14977078730424456"/>
-                  <c:y val="-0.32160906969962089"/>
+                  <c:x val="-0.10853667240915034"/>
+                  <c:y val="-0.34012758821813938"/>
                 </c:manualLayout>
               </c:layout>
               <c:numFmt formatCode="General" sourceLinked="0"/>
@@ -3732,7 +3728,7 @@
           <c:smooth val="0"/>
           <c:extLst>
             <c:ext xmlns:c16="http://schemas.microsoft.com/office/drawing/2014/chart" uri="{C3380CC4-5D6E-409C-BE32-E72D297353CC}">
-              <c16:uniqueId val="{00000003-95CD-4759-A67A-8AA89C12FA93}"/>
+              <c16:uniqueId val="{00000003-4881-4E87-AF54-7B7C0A0AD81A}"/>
             </c:ext>
           </c:extLst>
         </c:ser>
@@ -3751,7 +3747,8 @@
         <c:axId val="498062240"/>
         <c:scaling>
           <c:orientation val="minMax"/>
-          <c:min val="0"/>
+          <c:max val="0.15000000000000002"/>
+          <c:min val="-0.1"/>
         </c:scaling>
         <c:delete val="0"/>
         <c:axPos val="b"/>
@@ -3787,6 +3784,7 @@
               </a:p>
             </c:rich>
           </c:tx>
+          <c:layout/>
           <c:overlay val="0"/>
           <c:spPr>
             <a:noFill/>
@@ -3847,7 +3845,7 @@
         <c:crossAx val="498062656"/>
         <c:crossesAt val="-0.25"/>
         <c:crossBetween val="midCat"/>
-        <c:majorUnit val="2.5000000000000005E-2"/>
+        <c:majorUnit val="5.000000000000001E-2"/>
       </c:valAx>
       <c:valAx>
         <c:axId val="498062656"/>
@@ -3889,7 +3887,7 @@
             <c:manualLayout>
               <c:xMode val="edge"/>
               <c:yMode val="edge"/>
-              <c:x val="7.3782804343523823E-3"/>
+              <c:x val="0"/>
               <c:y val="0.40142485661514526"/>
             </c:manualLayout>
           </c:layout>
@@ -4017,9 +4015,9 @@
         <c:manualLayout>
           <c:xMode val="edge"/>
           <c:yMode val="edge"/>
-          <c:x val="0.61367862855214794"/>
-          <c:y val="0.14732186254495963"/>
-          <c:w val="0.2347884202978954"/>
+          <c:x val="0.59719737597695222"/>
+          <c:y val="0.12571692427335471"/>
+          <c:w val="0.22860795058219699"/>
           <c:h val="0.1713283756197142"/>
         </c:manualLayout>
       </c:layout>
@@ -10858,48 +10856,18 @@
       </p:grpSpPr>
       <p:grpSp>
         <p:nvGrpSpPr>
-          <p:cNvPr id="5" name="Grupo 4"/>
+          <p:cNvPr id="2" name="Grupo 1"/>
           <p:cNvGrpSpPr/>
           <p:nvPr/>
         </p:nvGrpSpPr>
         <p:grpSpPr>
           <a:xfrm>
-            <a:off x="980728" y="1331640"/>
-            <a:ext cx="4596434" cy="5623520"/>
-            <a:chOff x="980728" y="1331640"/>
-            <a:chExt cx="4596434" cy="5623520"/>
+            <a:off x="908720" y="1403648"/>
+            <a:ext cx="4572000" cy="5551512"/>
+            <a:chOff x="908720" y="1403648"/>
+            <a:chExt cx="4572000" cy="5551512"/>
           </a:xfrm>
         </p:grpSpPr>
-        <p:graphicFrame>
-          <p:nvGraphicFramePr>
-            <p:cNvPr id="14" name="Gráfico 13">
-              <a:extLst>
-                <a:ext uri="{FF2B5EF4-FFF2-40B4-BE49-F238E27FC236}">
-                  <a16:creationId xmlns:a16="http://schemas.microsoft.com/office/drawing/2014/main" id="{00000000-0008-0000-0300-000005000000}"/>
-                </a:ext>
-              </a:extLst>
-            </p:cNvPr>
-            <p:cNvGraphicFramePr>
-              <a:graphicFrameLocks/>
-            </p:cNvGraphicFramePr>
-            <p:nvPr>
-              <p:extLst>
-                <p:ext uri="{D42A27DB-BD31-4B8C-83A1-F6EECF244321}">
-                  <p14:modId xmlns:p14="http://schemas.microsoft.com/office/powerpoint/2010/main" val="3474305778"/>
-                </p:ext>
-              </p:extLst>
-            </p:nvPr>
-          </p:nvGraphicFramePr>
-          <p:xfrm>
-            <a:off x="980728" y="1331640"/>
-            <a:ext cx="4572000" cy="2743200"/>
-          </p:xfrm>
-          <a:graphic>
-            <a:graphicData uri="http://schemas.openxmlformats.org/drawingml/2006/chart">
-              <c:chart xmlns:c="http://schemas.openxmlformats.org/drawingml/2006/chart" xmlns:r="http://schemas.openxmlformats.org/officeDocument/2006/relationships" r:id="rId2"/>
-            </a:graphicData>
-          </a:graphic>
-        </p:graphicFrame>
         <p:graphicFrame>
           <p:nvGraphicFramePr>
             <p:cNvPr id="15" name="Gráfico 14">
@@ -10915,13 +10883,43 @@
             <p:nvPr>
               <p:extLst>
                 <p:ext uri="{D42A27DB-BD31-4B8C-83A1-F6EECF244321}">
-                  <p14:modId xmlns:p14="http://schemas.microsoft.com/office/powerpoint/2010/main" val="2549487070"/>
+                  <p14:modId xmlns:p14="http://schemas.microsoft.com/office/powerpoint/2010/main" val="1235872717"/>
                 </p:ext>
               </p:extLst>
             </p:nvPr>
           </p:nvGraphicFramePr>
           <p:xfrm>
-            <a:off x="1005162" y="4211960"/>
+            <a:off x="908720" y="4211960"/>
+            <a:ext cx="4572000" cy="2743200"/>
+          </p:xfrm>
+          <a:graphic>
+            <a:graphicData uri="http://schemas.openxmlformats.org/drawingml/2006/chart">
+              <c:chart xmlns:c="http://schemas.openxmlformats.org/drawingml/2006/chart" xmlns:r="http://schemas.openxmlformats.org/officeDocument/2006/relationships" r:id="rId2"/>
+            </a:graphicData>
+          </a:graphic>
+        </p:graphicFrame>
+        <p:graphicFrame>
+          <p:nvGraphicFramePr>
+            <p:cNvPr id="6" name="Gráfico 5">
+              <a:extLst>
+                <a:ext uri="{FF2B5EF4-FFF2-40B4-BE49-F238E27FC236}">
+                  <a16:creationId xmlns:a16="http://schemas.microsoft.com/office/drawing/2014/main" id="{00000000-0008-0000-0300-000005000000}"/>
+                </a:ext>
+              </a:extLst>
+            </p:cNvPr>
+            <p:cNvGraphicFramePr>
+              <a:graphicFrameLocks/>
+            </p:cNvGraphicFramePr>
+            <p:nvPr>
+              <p:extLst>
+                <p:ext uri="{D42A27DB-BD31-4B8C-83A1-F6EECF244321}">
+                  <p14:modId xmlns:p14="http://schemas.microsoft.com/office/powerpoint/2010/main" val="3249734262"/>
+                </p:ext>
+              </p:extLst>
+            </p:nvPr>
+          </p:nvGraphicFramePr>
+          <p:xfrm>
+            <a:off x="908720" y="1403648"/>
             <a:ext cx="4572000" cy="2743200"/>
           </p:xfrm>
           <a:graphic>
@@ -11080,7 +11078,7 @@
       </p:grpSpPr>
       <p:graphicFrame>
         <p:nvGraphicFramePr>
-          <p:cNvPr id="2" name="Gráfico 1">
+          <p:cNvPr id="3" name="Gráfico 2">
             <a:extLst>
               <a:ext uri="{FF2B5EF4-FFF2-40B4-BE49-F238E27FC236}">
                 <a16:creationId xmlns:a16="http://schemas.microsoft.com/office/drawing/2014/main" id="{00000000-0008-0000-0500-000004000000}"/>
@@ -11093,7 +11091,7 @@
           <p:nvPr>
             <p:extLst>
               <p:ext uri="{D42A27DB-BD31-4B8C-83A1-F6EECF244321}">
-                <p14:modId xmlns:p14="http://schemas.microsoft.com/office/powerpoint/2010/main" val="3767082290"/>
+                <p14:modId xmlns:p14="http://schemas.microsoft.com/office/powerpoint/2010/main" val="422992808"/>
               </p:ext>
             </p:extLst>
           </p:nvPr>
